--- a/Presentation.pptx
+++ b/Presentation.pptx
@@ -2054,6 +2054,10 @@
             <a:prstDash val="solid"/>
           </a:ln>
         </p:spPr>
+        <p:txBody>
+          <a:bodyPr/>
+          <a:p/>
+        </p:txBody>
       </p:sp>
       <p:sp>
         <p:nvSpPr>
@@ -2079,6 +2083,10 @@
             <a:prstDash val="solid"/>
           </a:ln>
         </p:spPr>
+        <p:txBody>
+          <a:bodyPr/>
+          <a:p/>
+        </p:txBody>
       </p:sp>
       <p:sp>
         <p:nvSpPr>
@@ -2792,6 +2800,10 @@
             <a:prstDash val="solid"/>
           </a:ln>
         </p:spPr>
+        <p:txBody>
+          <a:bodyPr/>
+          <a:p/>
+        </p:txBody>
       </p:sp>
       <p:sp>
         <p:nvSpPr>
@@ -3127,6 +3139,10 @@
             <a:prstDash val="solid"/>
           </a:ln>
         </p:spPr>
+        <p:txBody>
+          <a:bodyPr/>
+          <a:p/>
+        </p:txBody>
       </p:sp>
       <p:sp>
         <p:nvSpPr>
@@ -3519,6 +3535,10 @@
             <a:prstDash val="solid"/>
           </a:ln>
         </p:spPr>
+        <p:txBody>
+          <a:bodyPr/>
+          <a:p/>
+        </p:txBody>
       </p:sp>
       <p:sp>
         <p:nvSpPr>
@@ -3661,6 +3681,10 @@
             <a:prstDash val="solid"/>
           </a:ln>
         </p:spPr>
+        <p:txBody>
+          <a:bodyPr/>
+          <a:p/>
+        </p:txBody>
       </p:sp>
       <p:sp>
         <p:nvSpPr>
@@ -3803,6 +3827,10 @@
             <a:prstDash val="solid"/>
           </a:ln>
         </p:spPr>
+        <p:txBody>
+          <a:bodyPr/>
+          <a:p/>
+        </p:txBody>
       </p:sp>
       <p:sp>
         <p:nvSpPr>
@@ -4390,6 +4418,10 @@
             <a:prstDash val="solid"/>
           </a:ln>
         </p:spPr>
+        <p:txBody>
+          <a:bodyPr/>
+          <a:p/>
+        </p:txBody>
       </p:sp>
       <p:sp>
         <p:nvSpPr>
@@ -4532,6 +4564,10 @@
             <a:prstDash val="solid"/>
           </a:ln>
         </p:spPr>
+        <p:txBody>
+          <a:bodyPr/>
+          <a:p/>
+        </p:txBody>
       </p:sp>
       <p:sp>
         <p:nvSpPr>
@@ -4979,6 +5015,10 @@
             <a:prstDash val="solid"/>
           </a:ln>
         </p:spPr>
+        <p:txBody>
+          <a:bodyPr/>
+          <a:p/>
+        </p:txBody>
       </p:sp>
       <p:sp>
         <p:nvSpPr>
@@ -5160,6 +5200,10 @@
             <a:prstDash val="solid"/>
           </a:ln>
         </p:spPr>
+        <p:txBody>
+          <a:bodyPr/>
+          <a:p/>
+        </p:txBody>
       </p:sp>
       <p:sp>
         <p:nvSpPr>
@@ -5341,6 +5385,10 @@
             <a:prstDash val="solid"/>
           </a:ln>
         </p:spPr>
+        <p:txBody>
+          <a:bodyPr/>
+          <a:p/>
+        </p:txBody>
       </p:sp>
       <p:sp>
         <p:nvSpPr>
@@ -5522,6 +5570,10 @@
             <a:prstDash val="solid"/>
           </a:ln>
         </p:spPr>
+        <p:txBody>
+          <a:bodyPr/>
+          <a:p/>
+        </p:txBody>
       </p:sp>
       <p:sp>
         <p:nvSpPr>
@@ -5703,6 +5755,10 @@
             <a:prstDash val="solid"/>
           </a:ln>
         </p:spPr>
+        <p:txBody>
+          <a:bodyPr/>
+          <a:p/>
+        </p:txBody>
       </p:sp>
       <p:sp>
         <p:nvSpPr>
@@ -6022,6 +6078,10 @@
             <a:prstDash val="solid"/>
           </a:ln>
         </p:spPr>
+        <p:txBody>
+          <a:bodyPr/>
+          <a:p/>
+        </p:txBody>
       </p:sp>
       <p:sp>
         <p:nvSpPr>
@@ -6434,6 +6494,10 @@
             <a:prstDash val="solid"/>
           </a:ln>
         </p:spPr>
+        <p:txBody>
+          <a:bodyPr/>
+          <a:p/>
+        </p:txBody>
       </p:sp>
       <p:sp>
         <p:nvSpPr>
@@ -6764,6 +6828,10 @@
             <a:prstDash val="solid"/>
           </a:ln>
         </p:spPr>
+        <p:txBody>
+          <a:bodyPr/>
+          <a:p/>
+        </p:txBody>
       </p:sp>
       <p:sp>
         <p:nvSpPr>
@@ -6789,6 +6857,10 @@
             <a:prstDash val="solid"/>
           </a:ln>
         </p:spPr>
+        <p:txBody>
+          <a:bodyPr/>
+          <a:p/>
+        </p:txBody>
       </p:sp>
       <p:sp>
         <p:nvSpPr>
@@ -6814,6 +6886,10 @@
             <a:prstDash val="solid"/>
           </a:ln>
         </p:spPr>
+        <p:txBody>
+          <a:bodyPr/>
+          <a:p/>
+        </p:txBody>
       </p:sp>
       <p:sp>
         <p:nvSpPr>
@@ -6956,6 +7032,10 @@
             <a:prstDash val="solid"/>
           </a:ln>
         </p:spPr>
+        <p:txBody>
+          <a:bodyPr/>
+          <a:p/>
+        </p:txBody>
       </p:sp>
       <p:sp>
         <p:nvSpPr>
@@ -6981,6 +7061,10 @@
             <a:prstDash val="solid"/>
           </a:ln>
         </p:spPr>
+        <p:txBody>
+          <a:bodyPr/>
+          <a:p/>
+        </p:txBody>
       </p:sp>
       <p:sp>
         <p:nvSpPr>
@@ -7123,6 +7207,10 @@
             <a:prstDash val="solid"/>
           </a:ln>
         </p:spPr>
+        <p:txBody>
+          <a:bodyPr/>
+          <a:p/>
+        </p:txBody>
       </p:sp>
       <p:sp>
         <p:nvSpPr>
@@ -7148,6 +7236,10 @@
             <a:prstDash val="solid"/>
           </a:ln>
         </p:spPr>
+        <p:txBody>
+          <a:bodyPr/>
+          <a:p/>
+        </p:txBody>
       </p:sp>
       <p:sp>
         <p:nvSpPr>
@@ -7290,6 +7382,10 @@
             <a:prstDash val="solid"/>
           </a:ln>
         </p:spPr>
+        <p:txBody>
+          <a:bodyPr/>
+          <a:p/>
+        </p:txBody>
       </p:sp>
       <p:sp>
         <p:nvSpPr>
@@ -7315,6 +7411,10 @@
             <a:prstDash val="solid"/>
           </a:ln>
         </p:spPr>
+        <p:txBody>
+          <a:bodyPr/>
+          <a:p/>
+        </p:txBody>
       </p:sp>
       <p:sp>
         <p:nvSpPr>
@@ -8945,6 +9045,10 @@
             <a:prstDash val="solid"/>
           </a:ln>
         </p:spPr>
+        <p:txBody>
+          <a:bodyPr/>
+          <a:p/>
+        </p:txBody>
       </p:sp>
       <p:sp>
         <p:nvSpPr>
@@ -10048,7 +10152,7 @@
                 <a:ea typeface="Calibri" pitchFamily="34" charset="-122"/>
                 <a:cs typeface="Calibri" pitchFamily="34" charset="-120"/>
               </a:rPr>
-              <a:t>Целевая эмоция доминирует у 6/7, но рядом — реальная вторичная ко-активация sadness.</a:t>
+              <a:t>Все 7 диагоналей значимы, но target=argmax только у 4/7. У disgust/guilt/sadness — fear-аггрегатор.</a:t>
             </a:r>
             <a:endParaRPr lang="en-US" sz="1700" dirty="0"/>
           </a:p>
@@ -10188,7 +10292,7 @@
                 <a:ea typeface="Calibri" pitchFamily="34" charset="-122"/>
                 <a:cs typeface="Calibri" pitchFamily="34" charset="-120"/>
               </a:rPr>
-              <a:t>+57</a:t>
+              <a:t>+59</a:t>
             </a:r>
             <a:endParaRPr lang="en-US" sz="1700" dirty="0"/>
           </a:p>
@@ -10227,7 +10331,7 @@
                 <a:ea typeface="Calibri" pitchFamily="34" charset="-122"/>
                 <a:cs typeface="Calibri" pitchFamily="34" charset="-120"/>
               </a:rPr>
-              <a:t>[46, 67]</a:t>
+              <a:t>[+48, +69]</a:t>
             </a:r>
             <a:endParaRPr lang="en-US" sz="1500" dirty="0"/>
           </a:p>
@@ -10266,7 +10370,7 @@
                 <a:ea typeface="Calibri" pitchFamily="34" charset="-122"/>
                 <a:cs typeface="Calibri" pitchFamily="34" charset="-120"/>
               </a:rPr>
-              <a:t>fear</a:t>
+              <a:t>joy</a:t>
             </a:r>
             <a:endParaRPr lang="en-US" sz="1700" dirty="0"/>
           </a:p>
@@ -10305,7 +10409,7 @@
                 <a:ea typeface="Calibri" pitchFamily="34" charset="-122"/>
                 <a:cs typeface="Calibri" pitchFamily="34" charset="-120"/>
               </a:rPr>
-              <a:t>+48</a:t>
+              <a:t>+56</a:t>
             </a:r>
             <a:endParaRPr lang="en-US" sz="1700" dirty="0"/>
           </a:p>
@@ -10344,7 +10448,7 @@
                 <a:ea typeface="Calibri" pitchFamily="34" charset="-122"/>
                 <a:cs typeface="Calibri" pitchFamily="34" charset="-120"/>
               </a:rPr>
-              <a:t>[36, 60]</a:t>
+              <a:t>[+43, +69]</a:t>
             </a:r>
             <a:endParaRPr lang="en-US" sz="1500" dirty="0"/>
           </a:p>
@@ -10383,7 +10487,7 @@
                 <a:ea typeface="Calibri" pitchFamily="34" charset="-122"/>
                 <a:cs typeface="Calibri" pitchFamily="34" charset="-120"/>
               </a:rPr>
-              <a:t>guilt</a:t>
+              <a:t>anger</a:t>
             </a:r>
             <a:endParaRPr lang="en-US" sz="1700" dirty="0"/>
           </a:p>
@@ -10422,7 +10526,7 @@
                 <a:ea typeface="Calibri" pitchFamily="34" charset="-122"/>
                 <a:cs typeface="Calibri" pitchFamily="34" charset="-120"/>
               </a:rPr>
-              <a:t>+49</a:t>
+              <a:t>+46</a:t>
             </a:r>
             <a:endParaRPr lang="en-US" sz="1700" dirty="0"/>
           </a:p>
@@ -10461,7 +10565,7 @@
                 <a:ea typeface="Calibri" pitchFamily="34" charset="-122"/>
                 <a:cs typeface="Calibri" pitchFamily="34" charset="-120"/>
               </a:rPr>
-              <a:t>[37, 60]</a:t>
+              <a:t>[+36, +56]</a:t>
             </a:r>
             <a:endParaRPr lang="en-US" sz="1500" dirty="0"/>
           </a:p>
@@ -10500,7 +10604,7 @@
                 <a:ea typeface="Calibri" pitchFamily="34" charset="-122"/>
                 <a:cs typeface="Calibri" pitchFamily="34" charset="-120"/>
               </a:rPr>
-              <a:t>sadness</a:t>
+              <a:t>fear</a:t>
             </a:r>
             <a:endParaRPr lang="en-US" sz="1700" dirty="0"/>
           </a:p>
@@ -10539,7 +10643,7 @@
                 <a:ea typeface="Calibri" pitchFamily="34" charset="-122"/>
                 <a:cs typeface="Calibri" pitchFamily="34" charset="-120"/>
               </a:rPr>
-              <a:t>+44</a:t>
+              <a:t>+46</a:t>
             </a:r>
             <a:endParaRPr lang="en-US" sz="1700" dirty="0"/>
           </a:p>
@@ -10578,7 +10682,7 @@
                 <a:ea typeface="Calibri" pitchFamily="34" charset="-122"/>
                 <a:cs typeface="Calibri" pitchFamily="34" charset="-120"/>
               </a:rPr>
-              <a:t>[33, 54]</a:t>
+              <a:t>[+33, +57]</a:t>
             </a:r>
             <a:endParaRPr lang="en-US" sz="1500" dirty="0"/>
           </a:p>
@@ -10617,7 +10721,7 @@
                 <a:ea typeface="Calibri" pitchFamily="34" charset="-122"/>
                 <a:cs typeface="Calibri" pitchFamily="34" charset="-120"/>
               </a:rPr>
-              <a:t>anger</a:t>
+              <a:t>disgust</a:t>
             </a:r>
             <a:endParaRPr lang="en-US" sz="1700" dirty="0"/>
           </a:p>
@@ -10656,7 +10760,7 @@
                 <a:ea typeface="Calibri" pitchFamily="34" charset="-122"/>
                 <a:cs typeface="Calibri" pitchFamily="34" charset="-120"/>
               </a:rPr>
-              <a:t>+36</a:t>
+              <a:t>+40</a:t>
             </a:r>
             <a:endParaRPr lang="en-US" sz="1700" dirty="0"/>
           </a:p>
@@ -10695,7 +10799,7 @@
                 <a:ea typeface="Calibri" pitchFamily="34" charset="-122"/>
                 <a:cs typeface="Calibri" pitchFamily="34" charset="-120"/>
               </a:rPr>
-              <a:t>[25, 47]</a:t>
+              <a:t>[+29, +51]</a:t>
             </a:r>
             <a:endParaRPr lang="en-US" sz="1500" dirty="0"/>
           </a:p>
@@ -10734,7 +10838,7 @@
                 <a:ea typeface="Calibri" pitchFamily="34" charset="-122"/>
                 <a:cs typeface="Calibri" pitchFamily="34" charset="-120"/>
               </a:rPr>
-              <a:t>joy</a:t>
+              <a:t>guilt</a:t>
             </a:r>
             <a:endParaRPr lang="en-US" sz="1700" dirty="0"/>
           </a:p>
@@ -10773,7 +10877,7 @@
                 <a:ea typeface="Calibri" pitchFamily="34" charset="-122"/>
                 <a:cs typeface="Calibri" pitchFamily="34" charset="-120"/>
               </a:rPr>
-              <a:t>+34</a:t>
+              <a:t>+39</a:t>
             </a:r>
             <a:endParaRPr lang="en-US" sz="1700" dirty="0"/>
           </a:p>
@@ -10812,7 +10916,7 @@
                 <a:ea typeface="Calibri" pitchFamily="34" charset="-122"/>
                 <a:cs typeface="Calibri" pitchFamily="34" charset="-120"/>
               </a:rPr>
-              <a:t>[20, 48]</a:t>
+              <a:t>[+25, +52]</a:t>
             </a:r>
             <a:endParaRPr lang="en-US" sz="1500" dirty="0"/>
           </a:p>
@@ -10851,7 +10955,7 @@
                 <a:ea typeface="Calibri" pitchFamily="34" charset="-122"/>
                 <a:cs typeface="Calibri" pitchFamily="34" charset="-120"/>
               </a:rPr>
-              <a:t>disgust</a:t>
+              <a:t>sadness</a:t>
             </a:r>
             <a:endParaRPr lang="en-US" sz="1700" dirty="0"/>
           </a:p>
@@ -10890,7 +10994,7 @@
                 <a:ea typeface="Calibri" pitchFamily="34" charset="-122"/>
                 <a:cs typeface="Calibri" pitchFamily="34" charset="-120"/>
               </a:rPr>
-              <a:t>+29</a:t>
+              <a:t>+38</a:t>
             </a:r>
             <a:endParaRPr lang="en-US" sz="1700" dirty="0"/>
           </a:p>
@@ -10929,7 +11033,7 @@
                 <a:ea typeface="Calibri" pitchFamily="34" charset="-122"/>
                 <a:cs typeface="Calibri" pitchFamily="34" charset="-120"/>
               </a:rPr>
-              <a:t>[19, 40]</a:t>
+              <a:t>[+27, +48]</a:t>
             </a:r>
             <a:endParaRPr lang="en-US" sz="1500" dirty="0"/>
           </a:p>
@@ -10957,6 +11061,10 @@
             <a:prstDash val="solid"/>
           </a:ln>
         </p:spPr>
+        <p:txBody>
+          <a:bodyPr/>
+          <a:p/>
+        </p:txBody>
       </p:sp>
       <p:sp>
         <p:nvSpPr>
@@ -10991,7 +11099,7 @@
                 <a:ea typeface="Calibri" pitchFamily="34" charset="-122"/>
                 <a:cs typeface="Calibri" pitchFamily="34" charset="-120"/>
               </a:rPr>
-              <a:t>Протечка в sadness</a:t>
+              <a:t>Аргмакс не на диагонали:</a:t>
             </a:r>
             <a:endParaRPr lang="en-US" sz="1400" dirty="0"/>
           </a:p>
@@ -11030,7 +11138,7 @@
                 <a:ea typeface="Georgia" pitchFamily="34" charset="-122"/>
                 <a:cs typeface="Georgia" pitchFamily="34" charset="-120"/>
               </a:rPr>
-              <a:t>+28  [+20, +37]</a:t>
+              <a:t>disgust→fear, guilt→sadness, sadness→fear</a:t>
             </a:r>
             <a:endParaRPr lang="en-US" sz="3200" dirty="0"/>
           </a:p>
@@ -11365,6 +11473,10 @@
             <a:prstDash val="solid"/>
           </a:ln>
         </p:spPr>
+        <p:txBody>
+          <a:bodyPr/>
+          <a:p/>
+        </p:txBody>
       </p:sp>
       <p:sp>
         <p:nvSpPr>
@@ -11468,6 +11580,10 @@
             <a:prstDash val="solid"/>
           </a:ln>
         </p:spPr>
+        <p:txBody>
+          <a:bodyPr/>
+          <a:p/>
+        </p:txBody>
       </p:sp>
       <p:sp>
         <p:nvSpPr>
@@ -11571,6 +11687,10 @@
             <a:prstDash val="solid"/>
           </a:ln>
         </p:spPr>
+        <p:txBody>
+          <a:bodyPr/>
+          <a:p/>
+        </p:txBody>
       </p:sp>
       <p:sp>
         <p:nvSpPr>
@@ -12126,6 +12246,10 @@
             <a:prstDash val="solid"/>
           </a:ln>
         </p:spPr>
+        <p:txBody>
+          <a:bodyPr/>
+          <a:p/>
+        </p:txBody>
       </p:sp>
       <p:sp>
         <p:nvSpPr>
@@ -12363,6 +12487,10 @@
             <a:prstDash val="solid"/>
           </a:ln>
         </p:spPr>
+        <p:txBody>
+          <a:bodyPr/>
+          <a:p/>
+        </p:txBody>
       </p:sp>
       <p:sp>
         <p:nvSpPr>
@@ -12600,6 +12728,10 @@
             <a:prstDash val="solid"/>
           </a:ln>
         </p:spPr>
+        <p:txBody>
+          <a:bodyPr/>
+          <a:p/>
+        </p:txBody>
       </p:sp>
       <p:sp>
         <p:nvSpPr>

--- a/Presentation.pptx
+++ b/Presentation.pptx
@@ -2877,7 +2877,7 @@
                 <a:ea typeface="Georgia" pitchFamily="34" charset="-122"/>
                 <a:cs typeface="Georgia" pitchFamily="34" charset="-120"/>
               </a:rPr>
-              <a:t>+36</a:t>
+              <a:t>+46</a:t>
             </a:r>
             <a:endParaRPr lang="en-US" sz="2800" dirty="0"/>
           </a:p>
@@ -2916,7 +2916,7 @@
                 <a:ea typeface="Georgia" pitchFamily="34" charset="-122"/>
                 <a:cs typeface="Georgia" pitchFamily="34" charset="-120"/>
               </a:rPr>
-              <a:t>6 / 7</a:t>
+              <a:t>4 / 7</a:t>
             </a:r>
             <a:endParaRPr lang="en-US" sz="2800" dirty="0"/>
           </a:p>
@@ -2955,7 +2955,7 @@
                 <a:ea typeface="Georgia" pitchFamily="34" charset="-122"/>
                 <a:cs typeface="Georgia" pitchFamily="34" charset="-120"/>
               </a:rPr>
-              <a:t>+28  [+20, +37]</a:t>
+              <a:t>+25  [+16, +34]</a:t>
             </a:r>
             <a:endParaRPr lang="en-US" sz="1900" dirty="0"/>
           </a:p>
@@ -3033,7 +3033,7 @@
                 <a:ea typeface="Georgia" pitchFamily="34" charset="-122"/>
                 <a:cs typeface="Georgia" pitchFamily="34" charset="-120"/>
               </a:rPr>
-              <a:t>+44</a:t>
+              <a:t>+47</a:t>
             </a:r>
             <a:endParaRPr lang="en-US" sz="2800" dirty="0"/>
           </a:p>
@@ -3111,7 +3111,7 @@
                 <a:ea typeface="Georgia" pitchFamily="34" charset="-122"/>
                 <a:cs typeface="Georgia" pitchFamily="34" charset="-120"/>
               </a:rPr>
-              <a:t>+18  [+9,  +27]</a:t>
+              <a:t>+18  [+10, +27]</a:t>
             </a:r>
             <a:endParaRPr lang="en-US" sz="1900" dirty="0"/>
           </a:p>
@@ -3651,7 +3651,7 @@
                 <a:ea typeface="Calibri" pitchFamily="34" charset="-122"/>
                 <a:cs typeface="Calibri" pitchFamily="34" charset="-120"/>
               </a:rPr>
-              <a:t>обе вверх: joy +17, sadness +26.</a:t>
+              <a:t>обе вверх: joy +23, sadness +22.</a:t>
             </a:r>
             <a:endParaRPr lang="en-US" sz="1600" dirty="0"/>
           </a:p>
@@ -3719,7 +3719,7 @@
                 <a:ea typeface="Calibri" pitchFamily="34" charset="-122"/>
                 <a:cs typeface="Calibri" pitchFamily="34" charset="-120"/>
               </a:rPr>
-              <a:t>СИСТЕМНО 5/7</a:t>
+              <a:t>СИСТЕМНО 5/5</a:t>
             </a:r>
             <a:endParaRPr lang="en-US" sz="1300" dirty="0"/>
           </a:p>
@@ -3943,7 +3943,7 @@
                 <a:ea typeface="Calibri" pitchFamily="34" charset="-122"/>
                 <a:cs typeface="Calibri" pitchFamily="34" charset="-120"/>
               </a:rPr>
-              <a:t>joy +33 → +50. sadness −14 → −28.</a:t>
+              <a:t>joy +41 → +56. sadness −17 → −34.</a:t>
             </a:r>
             <a:endParaRPr lang="en-US" sz="1600" dirty="0"/>
           </a:p>
@@ -5170,7 +5170,7 @@
                 <a:ea typeface="Georgia" pitchFamily="34" charset="-122"/>
                 <a:cs typeface="Georgia" pitchFamily="34" charset="-120"/>
               </a:rPr>
-              <a:t>6 / 7</a:t>
+              <a:t>7 / 7</a:t>
             </a:r>
             <a:endParaRPr lang="en-US" sz="2400" dirty="0"/>
           </a:p>
@@ -5355,7 +5355,7 @@
                 <a:ea typeface="Georgia" pitchFamily="34" charset="-122"/>
                 <a:cs typeface="Georgia" pitchFamily="34" charset="-120"/>
               </a:rPr>
-              <a:t>+28</a:t>
+              <a:t>+25</a:t>
             </a:r>
             <a:endParaRPr lang="en-US" sz="2400" dirty="0"/>
           </a:p>
@@ -5725,7 +5725,7 @@
                 <a:ea typeface="Georgia" pitchFamily="34" charset="-122"/>
                 <a:cs typeface="Georgia" pitchFamily="34" charset="-120"/>
               </a:rPr>
-              <a:t>+50 / −28</a:t>
+              <a:t>+56 / −34</a:t>
             </a:r>
             <a:endParaRPr lang="en-US" sz="2400" dirty="0"/>
           </a:p>
@@ -6298,7 +6298,7 @@
                 <a:ea typeface="Calibri" pitchFamily="34" charset="-122"/>
                 <a:cs typeface="Calibri" pitchFamily="34" charset="-120"/>
               </a:rPr>
-              <a:t>W8 — «аттрактор sadness» с CI</a:t>
+              <a:t>W8 — sadness +25 / fear-аггрегатор</a:t>
             </a:r>
             <a:endParaRPr lang="en-US" sz="1700" dirty="0"/>
           </a:p>
@@ -9083,7 +9083,7 @@
                 <a:ea typeface="Georgia" pitchFamily="34" charset="-122"/>
                 <a:cs typeface="Georgia" pitchFamily="34" charset="-120"/>
               </a:rPr>
-              <a:t>6 / 7</a:t>
+              <a:t>7 / 7</a:t>
             </a:r>
             <a:endParaRPr lang="en-US" sz="4000" dirty="0"/>
           </a:p>
